--- a/lmu-branded-test.pptx
+++ b/lmu-branded-test.pptx
@@ -9482,10 +9482,10 @@
       </p:grpSpPr>
       <p:sp>
         <p:nvSpPr>
-          <p:cNvPr id="2" name="Title 1">
+          <p:cNvPr id="9" name="Title 1">
             <a:extLst>
               <a:ext uri="{FF2B5EF4-FFF2-40B4-BE49-F238E27FC236}">
-                <a16:creationId xmlns:a16="http://schemas.microsoft.com/office/drawing/2014/main" id="{12131F71-CF7E-3DA4-7847-3ACEC01625C3}"/>
+                <a16:creationId xmlns:a16="http://schemas.microsoft.com/office/drawing/2014/main" id="{BC937C47-2970-C17A-04A2-184F783AD95F}"/>
               </a:ext>
             </a:extLst>
           </p:cNvPr>
@@ -9498,8 +9498,8 @@
         </p:nvSpPr>
         <p:spPr>
           <a:xfrm>
-            <a:off x="446399" y="1392999"/>
-            <a:ext cx="4735201" cy="996952"/>
+            <a:off x="2295524" y="432532"/>
+            <a:ext cx="9450077" cy="825501"/>
           </a:xfrm>
         </p:spPr>
         <p:txBody>
@@ -9518,10 +9518,10 @@
       </p:sp>
       <p:sp>
         <p:nvSpPr>
-          <p:cNvPr id="4" name="Text Placeholder 3">
+          <p:cNvPr id="3" name="Content Placeholder 2">
             <a:extLst>
               <a:ext uri="{FF2B5EF4-FFF2-40B4-BE49-F238E27FC236}">
-                <a16:creationId xmlns:a16="http://schemas.microsoft.com/office/drawing/2014/main" id="{7381D285-C44D-D095-90F1-6D3CF7B2C883}"/>
+                <a16:creationId xmlns:a16="http://schemas.microsoft.com/office/drawing/2014/main" id="{2E30DF69-0E9B-E535-4A08-1A4493559DC4}"/>
               </a:ext>
             </a:extLst>
           </p:cNvPr>
@@ -9529,7 +9529,7 @@
             <a:spLocks noGrp="1"/>
           </p:cNvSpPr>
           <p:nvPr>
-            <p:ph idx="2" sz="half" type="body"/>
+            <p:ph idx="1" sz="half"/>
           </p:nvPr>
         </p:nvSpPr>
         <p:spPr/>
@@ -9584,8 +9584,8 @@
         </p:blipFill>
         <p:spPr bwMode="auto">
           <a:xfrm>
-            <a:off x="5372100" y="2438400"/>
-            <a:ext cx="6362700" cy="2235200"/>
+            <a:off x="6159500" y="2628900"/>
+            <a:ext cx="5562600" cy="1955800"/>
           </a:xfrm>
           <a:prstGeom prst="rect">
             <a:avLst/>
@@ -9608,8 +9608,8 @@
         </p:nvSpPr>
         <p:spPr>
           <a:xfrm>
-            <a:off x="5372100" y="5524500"/>
-            <a:ext cx="6362700" cy="508000"/>
+            <a:off x="6159500" y="5651500"/>
+            <a:ext cx="5562600" cy="508000"/>
           </a:xfrm>
           <a:prstGeom prst="rect">
             <a:avLst/>
@@ -9632,10 +9632,10 @@
       </p:sp>
       <p:sp>
         <p:nvSpPr>
-          <p:cNvPr id="3" name="Content Placeholder 2">
+          <p:cNvPr id="4" name="Content Placeholder 3">
             <a:extLst>
               <a:ext uri="{FF2B5EF4-FFF2-40B4-BE49-F238E27FC236}">
-                <a16:creationId xmlns:a16="http://schemas.microsoft.com/office/drawing/2014/main" id="{1ABD3518-0673-3D1D-365A-E2B15CD22643}"/>
+                <a16:creationId xmlns:a16="http://schemas.microsoft.com/office/drawing/2014/main" id="{3ADB2C77-250F-A7AE-9022-31D102256250}"/>
               </a:ext>
             </a:extLst>
           </p:cNvPr>
@@ -9643,7 +9643,7 @@
             <a:spLocks noGrp="1"/>
           </p:cNvSpPr>
           <p:nvPr>
-            <p:ph idx="1"/>
+            <p:ph idx="2" sz="half"/>
           </p:nvPr>
         </p:nvSpPr>
         <p:spPr/>
@@ -9674,7 +9674,7 @@
           <p:cNvPr id="7" name="Slide Number Placeholder 6">
             <a:extLst>
               <a:ext uri="{FF2B5EF4-FFF2-40B4-BE49-F238E27FC236}">
-                <a16:creationId xmlns:a16="http://schemas.microsoft.com/office/drawing/2014/main" id="{7EC0C6E5-A864-8D29-B45D-21E23026496C}"/>
+                <a16:creationId xmlns:a16="http://schemas.microsoft.com/office/drawing/2014/main" id="{845D32B8-3259-7568-F10A-9EE0233C7895}"/>
               </a:ext>
             </a:extLst>
           </p:cNvPr>
